--- a/Valoración Aduanera y Nomenclatura 26-2-564P-B/Plantillas/Tarea 4/Tarea4 - Regímenes Aduaneros Especiales.pptx
+++ b/Valoración Aduanera y Nomenclatura 26-2-564P-B/Plantillas/Tarea 4/Tarea4 - Regímenes Aduaneros Especiales.pptx
@@ -8317,7 +8317,7 @@
                 <a:ea typeface="Cambria" pitchFamily="34" charset="-122"/>
                 <a:cs typeface="Cambria" pitchFamily="34" charset="-120"/>
               </a:rPr>
-              <a:t>8 unidades por reexportar o nacionalizar.</a:t>
+              <a:t>8 unidades reexportadas: venta a comprador en Bolivia.</a:t>
             </a:r>
             <a:endParaRPr lang="en-US" sz="1150"/>
           </a:p>
@@ -8453,7 +8453,7 @@
                 <a:ea typeface="Cambria" pitchFamily="34" charset="-122"/>
                 <a:cs typeface="Cambria" pitchFamily="34" charset="-120"/>
               </a:rPr>
-              <a:t>El riesgo del régimen no es económico sino de gestión: si nadie controla la fecha de vencimiento, la nacionalización automática y la ejecución de la garantía ocurren solas. Llevar el control del plazo es tan importante como haber calculado bien la fianza.</a:t>
+              <a:t>El riesgo del régimen no es económico sino de gestión: si nadie controla la fecha de vencimiento, la nacionalización automática y la ejecución de la garantía ocurren solas. Llevar el control del plazo es tan importante como haber calculado bien la fianza. Las 8 unidades restantes cierran el caso sin pagar tributo alguno: se reexportan por venta a un comprador en Bolivia.</a:t>
             </a:r>
             <a:endParaRPr lang="en-US" sz="1350"/>
           </a:p>
@@ -41667,7 +41667,7 @@
                 <a:ea typeface="Century Schoolbook" pitchFamily="34" charset="-122"/>
                 <a:cs typeface="Century Schoolbook" pitchFamily="34" charset="-120"/>
               </a:rPr>
-              <a:t>Conclusión del régimen</a:t>
+              <a:t>Reexportación final a Bolivia</a:t>
             </a:r>
             <a:endParaRPr lang="en-US" sz="1250"/>
           </a:p>
@@ -41709,7 +41709,7 @@
                 <a:ea typeface="Cambria" pitchFamily="34" charset="-122"/>
                 <a:cs typeface="Cambria" pitchFamily="34" charset="-120"/>
               </a:rPr>
-              <a:t>Las 8 unidades restantes deben reexportarse o nacionalizarse antes del vencimiento.</a:t>
+              <a:t>Las 8 unidades restantes se venden a un comprador boliviano y se reexportan en el mismo estado.</a:t>
             </a:r>
             <a:endParaRPr lang="en-US" sz="1050"/>
           </a:p>
@@ -41794,7 +41794,7 @@
                 <a:ea typeface="Cambria" pitchFamily="34" charset="-122"/>
                 <a:cs typeface="Cambria" pitchFamily="34" charset="-120"/>
               </a:rPr>
-              <a:t>DAM de Reexportación, o</a:t>
+              <a:t>DAM de Reexportación</a:t>
             </a:r>
             <a:endParaRPr lang="en-US" sz="1000"/>
           </a:p>
@@ -41818,7 +41818,7 @@
                 <a:ea typeface="Cambria" pitchFamily="34" charset="-122"/>
                 <a:cs typeface="Cambria" pitchFamily="34" charset="-120"/>
               </a:rPr>
-              <a:t>DAM Importación para el Consumo</a:t>
+              <a:t>Contrato de compraventa (Bolivia)</a:t>
             </a:r>
             <a:endParaRPr lang="en-US" sz="1000"/>
           </a:p>
